--- a/slides/decks/L03-svm.pptx
+++ b/slides/decks/L03-svm.pptx
@@ -118,13 +118,13 @@
   <p:extLst>
     <p:ext uri="{521415D9-36F7-43E2-AB2F-B90AF26B5E84}">
       <p14:sectionLst xmlns:p14="http://schemas.microsoft.com/office/powerpoint/2010/main">
-        <p14:section name="开场" id="{b719a1f4-9dcc-f814-1328-60419c1dd607}">
+        <p14:section name="开场" id="{85d3ff2e-d1f6-c0e1-ce6e-d3a20199b9af}">
           <p14:sldIdLst>
             <p14:sldId id="256"/>
             <p14:sldId id="257"/>
           </p14:sldIdLst>
         </p14:section>
-        <p14:section name="讲解" id="{a7cb4222-0321-57ee-9c50-80740f48933c}">
+        <p14:section name="讲解" id="{a86eced0-9fe7-0016-b38b-e1bfb8b9bec2}">
           <p14:sldIdLst>
             <p14:sldId id="258"/>
             <p14:sldId id="259"/>
@@ -135,13 +135,13 @@
             <p14:sldId id="264"/>
           </p14:sldIdLst>
         </p14:section>
-        <p14:section name="练习" id="{14df5985-b9bc-0d2a-6370-fde9bcc5bb27}">
+        <p14:section name="练习" id="{bc006e5d-5605-4c38-3986-83df2b1ec35d}">
           <p14:sldIdLst>
             <p14:sldId id="265"/>
             <p14:sldId id="266"/>
           </p14:sldIdLst>
         </p14:section>
-        <p14:section name="收束" id="{957da830-3c3d-a8cd-bece-4fbf9ff17db7}">
+        <p14:section name="收束" id="{611684ca-f692-f5f0-d368-15f801e06a55}">
           <p14:sldIdLst>
             <p14:sldId id="267"/>
           </p14:sldIdLst>
